--- a/system-design-101/vi/lessons/sd-13-005/slides/sd-13-005.pptx
+++ b/system-design-101/vi/lessons/sd-13-005/slides/sd-13-005.pptx
@@ -1790,7 +1790,7 @@
         <p:spPr>
           <a:xfrm>
             <a:off x="914400" y="1524000"/>
-            <a:ext cx="8572500" cy="2286000"/>
+            <a:ext cx="8572500" cy="3238500"/>
           </a:xfrm>
           <a:prstGeom prst="rect">
             <a:avLst/>
@@ -1799,17 +1799,17 @@
           <a:ln/>
         </p:spPr>
         <p:txBody>
-          <a:bodyPr wrap="square" lIns="0" tIns="68453" rIns="0" bIns="-68453" rtlCol="0" anchor="t"/>
+          <a:bodyPr wrap="square" lIns="0" tIns="72009" rIns="0" bIns="-72009" rtlCol="0" anchor="t"/>
           <a:lstStyle/>
           <a:p>
             <a:pPr algn="l" indent="0" marL="0">
               <a:lnSpc>
-                <a:spcPts val="8008"/>
+                <a:spcPts val="8424"/>
               </a:lnSpc>
               <a:buNone/>
             </a:pPr>
             <a:r>
-              <a:rPr lang="en-US" sz="7700" dirty="0" spc="5" kern="0">
+              <a:rPr lang="en-US" sz="8100" dirty="0" spc="6" kern="0">
                 <a:solidFill>
                   <a:srgbClr val="F3EEE3"/>
                 </a:solidFill>
@@ -1820,7 +1820,7 @@
               <a:t>Chọn</a:t>
             </a:r>
             <a:r>
-              <a:rPr lang="en-US" sz="7700" dirty="0" spc="1" kern="0">
+              <a:rPr lang="en-US" sz="8100" dirty="0" spc="-1" kern="0">
                 <a:solidFill>
                   <a:srgbClr val="F3EEE3"/>
                 </a:solidFill>
@@ -1831,7 +1831,7 @@
               <a:t> cơ</a:t>
             </a:r>
             <a:r>
-              <a:rPr lang="en-US" sz="7700" dirty="0" spc="3" kern="0">
+              <a:rPr lang="en-US" sz="8100" dirty="0" spc="-3" kern="0">
                 <a:solidFill>
                   <a:srgbClr val="F3EEE3"/>
                 </a:solidFill>
@@ -1842,7 +1842,7 @@
               <a:t> sở</a:t>
             </a:r>
             <a:r>
-              <a:rPr lang="en-US" sz="7700" dirty="0" spc="-2" kern="0">
+              <a:rPr lang="en-US" sz="8100" dirty="0" spc="0" kern="0">
                 <a:solidFill>
                   <a:srgbClr val="F3EEE3"/>
                 </a:solidFill>
@@ -1853,7 +1853,7 @@
               <a:t> dữ</a:t>
             </a:r>
             <a:r>
-              <a:rPr lang="en-US" sz="7700" dirty="0" spc="5" kern="0">
+              <a:rPr lang="en-US" sz="8100" dirty="0" spc="1" kern="0">
                 <a:solidFill>
                   <a:srgbClr val="F3EEE3"/>
                 </a:solidFill>
@@ -1864,7 +1864,7 @@
               <a:t> liệu</a:t>
             </a:r>
             <a:r>
-              <a:rPr lang="en-US" sz="7700" dirty="0" spc="2" kern="0">
+              <a:rPr lang="en-US" sz="8100" dirty="0" spc="2" kern="0">
                 <a:solidFill>
                   <a:srgbClr val="F3EEE3"/>
                 </a:solidFill>
@@ -1875,7 +1875,7 @@
               <a:t> cho</a:t>
             </a:r>
             <a:r>
-              <a:rPr lang="en-US" sz="7700" dirty="0" spc="0" kern="0">
+              <a:rPr lang="en-US" sz="8100" dirty="0" spc="-2" kern="0">
                 <a:solidFill>
                   <a:srgbClr val="F3EEE3"/>
                 </a:solidFill>
@@ -1886,7 +1886,7 @@
               <a:t> hệ</a:t>
             </a:r>
             <a:r>
-              <a:rPr lang="en-US" sz="7700" dirty="0" spc="1" kern="0">
+              <a:rPr lang="en-US" sz="8100" dirty="0" spc="1" kern="0">
                 <a:solidFill>
                   <a:srgbClr val="F3EEE3"/>
                 </a:solidFill>
@@ -1894,10 +1894,10 @@
                 <a:ea typeface="Bricolage Grotesque ExtraBold" pitchFamily="34" charset="-122"/>
                 <a:cs typeface="Bricolage Grotesque ExtraBold" pitchFamily="34" charset="-120"/>
               </a:rPr>
-              <a:t> thống</a:t>
-            </a:r>
-            <a:r>
-              <a:rPr lang="en-US" sz="7700" dirty="0" spc="3" kern="0">
+              <a:t> thống số</a:t>
+            </a:r>
+            <a:r>
+              <a:rPr lang="en-US" sz="8100" dirty="0" spc="21" kern="0">
                 <a:solidFill>
                   <a:srgbClr val="F3EEE3"/>
                 </a:solidFill>
@@ -1905,20 +1905,9 @@
                 <a:ea typeface="Bricolage Grotesque ExtraBold" pitchFamily="34" charset="-122"/>
                 <a:cs typeface="Bricolage Grotesque ExtraBold" pitchFamily="34" charset="-120"/>
               </a:rPr>
-              <a:t> số</a:t>
-            </a:r>
-            <a:r>
-              <a:rPr lang="en-US" sz="7700" dirty="0" spc="22" kern="0">
-                <a:solidFill>
-                  <a:srgbClr val="F3EEE3"/>
-                </a:solidFill>
-                <a:latin typeface="Bricolage Grotesque ExtraBold" pitchFamily="34" charset="0"/>
-                <a:ea typeface="Bricolage Grotesque ExtraBold" pitchFamily="34" charset="-122"/>
-                <a:cs typeface="Bricolage Grotesque ExtraBold" pitchFamily="34" charset="-120"/>
-              </a:rPr>
               <a:t> đo</a:t>
             </a:r>
-            <a:endParaRPr lang="en-US" sz="7700" dirty="0"/>
+            <a:endParaRPr lang="en-US" sz="8100" dirty="0"/>
           </a:p>
         </p:txBody>
       </p:sp>
@@ -1930,7 +1919,7 @@
         </p:nvSpPr>
         <p:spPr>
           <a:xfrm>
-            <a:off x="914400" y="4191000"/>
+            <a:off x="914400" y="5143500"/>
             <a:ext cx="8382000" cy="1047750"/>
           </a:xfrm>
           <a:prstGeom prst="rect">
@@ -2143,7 +2132,7 @@
               <a:t> nhóm</a:t>
             </a:r>
             <a:r>
-              <a:rPr lang="en-US" sz="1650" dirty="0" spc="-3" kern="0">
+              <a:rPr lang="en-US" sz="1650" dirty="0" spc="-4" kern="0">
                 <a:solidFill>
                   <a:srgbClr val="9AA0B5"/>
                 </a:solidFill>
@@ -2151,10 +2140,10 @@
                 <a:ea typeface="Be Vietnam Pro" pitchFamily="34" charset="-122"/>
                 <a:cs typeface="Be Vietnam Pro" pitchFamily="34" charset="-120"/>
               </a:rPr>
-              <a:t> Quan</a:t>
-            </a:r>
-            <a:r>
-              <a:rPr lang="en-US" sz="1650" dirty="0" spc="-9" kern="0">
+              <a:t> DevOps</a:t>
+            </a:r>
+            <a:r>
+              <a:rPr lang="en-US" sz="1650" dirty="0" spc="-7" kern="0">
                 <a:solidFill>
                   <a:srgbClr val="9AA0B5"/>
                 </a:solidFill>
@@ -2162,7 +2151,7 @@
                 <a:ea typeface="Be Vietnam Pro" pitchFamily="34" charset="-122"/>
                 <a:cs typeface="Be Vietnam Pro" pitchFamily="34" charset="-120"/>
               </a:rPr>
-              <a:t> sát</a:t>
+              <a:t> và</a:t>
             </a:r>
             <a:r>
               <a:rPr lang="en-US" sz="1650" dirty="0" spc="3" kern="0">
@@ -2173,18 +2162,7 @@
                 <a:ea typeface="Be Vietnam Pro" pitchFamily="34" charset="-122"/>
                 <a:cs typeface="Be Vietnam Pro" pitchFamily="34" charset="-120"/>
               </a:rPr>
-              <a:t> hệ</a:t>
-            </a:r>
-            <a:r>
-              <a:rPr lang="en-US" sz="1650" dirty="0" spc="1" kern="0">
-                <a:solidFill>
-                  <a:srgbClr val="9AA0B5"/>
-                </a:solidFill>
-                <a:latin typeface="Be Vietnam Pro" pitchFamily="34" charset="0"/>
-                <a:ea typeface="Be Vietnam Pro" pitchFamily="34" charset="-122"/>
-                <a:cs typeface="Be Vietnam Pro" pitchFamily="34" charset="-120"/>
-              </a:rPr>
-              <a:t> thống</a:t>
+              <a:t> CI/CD</a:t>
             </a:r>
             <a:endParaRPr lang="en-US" sz="1650" dirty="0"/>
           </a:p>

--- a/system-design-101/vi/lessons/sd-13-005/slides/sd-13-005.pptx
+++ b/system-design-101/vi/lessons/sd-13-005/slides/sd-13-005.pptx
@@ -9465,17 +9465,17 @@
           <a:ln/>
         </p:spPr>
         <p:txBody>
-          <a:bodyPr wrap="square" lIns="0" tIns="12954" rIns="0" bIns="-12954" rtlCol="0" anchor="t"/>
+          <a:bodyPr wrap="square" lIns="0" tIns="13764" rIns="0" bIns="-13764" rtlCol="0" anchor="t"/>
           <a:lstStyle/>
           <a:p>
             <a:pPr algn="l" indent="0" marL="0">
               <a:lnSpc>
-                <a:spcPts val="3120"/>
+                <a:spcPts val="3315"/>
               </a:lnSpc>
               <a:buNone/>
             </a:pPr>
             <a:r>
-              <a:rPr lang="en-US" sz="2400" dirty="0" spc="-1" kern="0">
+              <a:rPr lang="en-US" sz="2550" dirty="0" spc="-1" kern="0">
                 <a:solidFill>
                   <a:srgbClr val="6B6A66"/>
                 </a:solidFill>
@@ -9486,7 +9486,7 @@
               <a:t>Mỗi</a:t>
             </a:r>
             <a:r>
-              <a:rPr lang="en-US" sz="2400" dirty="0" spc="-14" kern="0">
+              <a:rPr lang="en-US" sz="2550" dirty="0" spc="-16" kern="0">
                 <a:solidFill>
                   <a:srgbClr val="6B6A66"/>
                 </a:solidFill>
@@ -9497,7 +9497,7 @@
               <a:t> tổ</a:t>
             </a:r>
             <a:r>
-              <a:rPr lang="en-US" sz="2400" dirty="0" spc="1" kern="0">
+              <a:rPr lang="en-US" sz="2550" dirty="0" spc="0" kern="0">
                 <a:solidFill>
                   <a:srgbClr val="6B6A66"/>
                 </a:solidFill>
@@ -9508,7 +9508,7 @@
               <a:t> hợp</a:t>
             </a:r>
             <a:r>
-              <a:rPr lang="en-US" sz="2400" dirty="0" spc="-1" kern="0">
+              <a:rPr lang="en-US" sz="2550" dirty="0" spc="-2" kern="0">
                 <a:solidFill>
                   <a:srgbClr val="6B6A66"/>
                 </a:solidFill>
@@ -9519,7 +9519,7 @@
               <a:t> sinh</a:t>
             </a:r>
             <a:r>
-              <a:rPr lang="en-US" sz="2400" dirty="0" spc="-30" kern="0">
+              <a:rPr lang="en-US" sz="2550" dirty="0" spc="-35" kern="0">
                 <a:solidFill>
                   <a:srgbClr val="6B6A66"/>
                 </a:solidFill>
@@ -9530,7 +9530,7 @@
               <a:t> ra</a:t>
             </a:r>
             <a:r>
-              <a:rPr lang="en-US" sz="2400" dirty="0" spc="-3" kern="0">
+              <a:rPr lang="en-US" sz="2550" dirty="0" spc="-5" kern="0">
                 <a:solidFill>
                   <a:srgbClr val="6B6A66"/>
                 </a:solidFill>
@@ -9541,7 +9541,7 @@
               <a:t> một</a:t>
             </a:r>
             <a:r>
-              <a:rPr lang="en-US" sz="2400" dirty="0" spc="-1" kern="0">
+              <a:rPr lang="en-US" sz="2550" dirty="0" spc="1" kern="0">
                 <a:solidFill>
                   <a:srgbClr val="6B6A66"/>
                 </a:solidFill>
@@ -9551,7 +9551,7 @@
               </a:rPr>
               <a:t> chuỗi.</a:t>
             </a:r>
-            <a:endParaRPr lang="en-US" sz="2400" dirty="0"/>
+            <a:endParaRPr lang="en-US" sz="2550" dirty="0"/>
           </a:p>
         </p:txBody>
       </p:sp>
@@ -13247,12 +13247,12 @@
           <a:ln/>
         </p:spPr>
         <p:txBody>
-          <a:bodyPr wrap="square" lIns="0" tIns="5334" rIns="0" bIns="-5334" rtlCol="0" anchor="t"/>
+          <a:bodyPr wrap="square" lIns="0" tIns="5667" rIns="0" bIns="-5667" rtlCol="0" anchor="t"/>
           <a:lstStyle/>
           <a:p>
-            <a:pPr algn="l" marL="304800" indent="-217761">
+            <a:pPr algn="l" marL="323850" indent="-231371">
               <a:lnSpc>
-                <a:spcPts val="3360"/>
+                <a:spcPts val="3570"/>
               </a:lnSpc>
               <a:spcAft>
                 <a:spcPts val="750"/>
@@ -13262,7 +13262,7 @@
               <a:buChar char="•"/>
             </a:pPr>
             <a:r>
-              <a:rPr lang="en-US" sz="2400" dirty="0" spc="1" kern="0">
+              <a:rPr lang="en-US" sz="2550" dirty="0" spc="0" kern="0">
                 <a:solidFill>
                   <a:srgbClr val="14161C"/>
                 </a:solidFill>
@@ -13270,10 +13270,10 @@
                 <a:ea typeface="Be Vietnam Pro" pitchFamily="34" charset="-122"/>
                 <a:cs typeface="Be Vietnam Pro" pitchFamily="34" charset="-120"/>
               </a:rPr>
-              <a:t>Điểm (thời</a:t>
-            </a:r>
-            <a:r>
-              <a:rPr lang="en-US" sz="2400" dirty="0" spc="2" kern="0">
+              <a:t>Điểm</a:t>
+            </a:r>
+            <a:r>
+              <a:rPr lang="en-US" sz="2550" dirty="0" spc="-1" kern="0">
                 <a:solidFill>
                   <a:srgbClr val="14161C"/>
                 </a:solidFill>
@@ -13281,10 +13281,10 @@
                 <a:ea typeface="Be Vietnam Pro" pitchFamily="34" charset="-122"/>
                 <a:cs typeface="Be Vietnam Pro" pitchFamily="34" charset="-120"/>
               </a:rPr>
-              <a:t> gian,</a:t>
-            </a:r>
-            <a:r>
-              <a:rPr lang="en-US" sz="2400" dirty="0" spc="1" kern="0">
+              <a:t> (thời gian,</a:t>
+            </a:r>
+            <a:r>
+              <a:rPr lang="en-US" sz="2550" dirty="0" spc="1" kern="0">
                 <a:solidFill>
                   <a:srgbClr val="14161C"/>
                 </a:solidFill>
@@ -13295,7 +13295,7 @@
               <a:t> giá</a:t>
             </a:r>
             <a:r>
-              <a:rPr lang="en-US" sz="2400" dirty="0" spc="12" kern="0">
+              <a:rPr lang="en-US" sz="2550" dirty="0" spc="10" kern="0">
                 <a:solidFill>
                   <a:srgbClr val="14161C"/>
                 </a:solidFill>
@@ -13306,7 +13306,7 @@
               <a:t> trị)</a:t>
             </a:r>
             <a:r>
-              <a:rPr lang="en-US" sz="2400" dirty="0" spc="-2" kern="0">
+              <a:rPr lang="en-US" sz="2550" dirty="0" spc="0" kern="0">
                 <a:solidFill>
                   <a:srgbClr val="14161C"/>
                 </a:solidFill>
@@ -13317,7 +13317,7 @@
               <a:t> thuộc</a:t>
             </a:r>
             <a:r>
-              <a:rPr lang="en-US" sz="2400" dirty="0" spc="-3" kern="0">
+              <a:rPr lang="en-US" sz="2550" dirty="0" spc="-6" kern="0">
                 <a:solidFill>
                   <a:srgbClr val="14161C"/>
                 </a:solidFill>
@@ -13328,7 +13328,7 @@
               <a:t> một</a:t>
             </a:r>
             <a:r>
-              <a:rPr lang="en-US" sz="2400" dirty="0" spc="-1" kern="0">
+              <a:rPr lang="en-US" sz="2550" dirty="0" spc="1" kern="0">
                 <a:solidFill>
                   <a:srgbClr val="14161C"/>
                 </a:solidFill>
@@ -13338,19 +13338,19 @@
               </a:rPr>
               <a:t> chuỗi.</a:t>
             </a:r>
-            <a:endParaRPr lang="en-US" sz="2400" dirty="0"/>
+            <a:endParaRPr lang="en-US" sz="2550" dirty="0"/>
           </a:p>
           <a:p>
-            <a:pPr algn="l" marL="304800" indent="-217761">
+            <a:pPr algn="l" marL="323850" indent="-231371">
               <a:lnSpc>
-                <a:spcPts val="3360"/>
+                <a:spcPts val="3570"/>
               </a:lnSpc>
               <a:buSzPct val="100000"/>
               <a:buFont typeface="Arial"/>
               <a:buChar char="•"/>
             </a:pPr>
             <a:r>
-              <a:rPr lang="en-US" sz="2400" dirty="0" spc="-2" kern="0">
+              <a:rPr lang="en-US" sz="2550" dirty="0" spc="1" kern="0">
                 <a:solidFill>
                   <a:srgbClr val="14161C"/>
                 </a:solidFill>
@@ -13361,7 +13361,7 @@
               <a:t>Chuỗi</a:t>
             </a:r>
             <a:r>
-              <a:rPr lang="en-US" sz="2400" dirty="0" spc="-16" kern="0">
+              <a:rPr lang="en-US" sz="2550" dirty="0" spc="-19" kern="0">
                 <a:solidFill>
                   <a:srgbClr val="14161C"/>
                 </a:solidFill>
@@ -13372,7 +13372,7 @@
               <a:t> xác</a:t>
             </a:r>
             <a:r>
-              <a:rPr lang="en-US" sz="2400" dirty="0" spc="20" kern="0">
+              <a:rPr lang="en-US" sz="2550" dirty="0" spc="21" kern="0">
                 <a:solidFill>
                   <a:srgbClr val="14161C"/>
                 </a:solidFill>
@@ -13383,7 +13383,7 @@
               <a:t> định</a:t>
             </a:r>
             <a:r>
-              <a:rPr lang="en-US" sz="2400" dirty="0" spc="-3" kern="0">
+              <a:rPr lang="en-US" sz="2550" dirty="0" spc="-4" kern="0">
                 <a:solidFill>
                   <a:srgbClr val="14161C"/>
                 </a:solidFill>
@@ -13394,7 +13394,7 @@
               <a:t> bởi</a:t>
             </a:r>
             <a:r>
-              <a:rPr lang="en-US" sz="2400" dirty="0" spc="-11" kern="0">
+              <a:rPr lang="en-US" sz="2550" dirty="0" spc="-11" kern="0">
                 <a:solidFill>
                   <a:srgbClr val="14161C"/>
                 </a:solidFill>
@@ -13405,7 +13405,7 @@
               <a:t> tên</a:t>
             </a:r>
             <a:r>
-              <a:rPr lang="en-US" sz="2400" dirty="0" spc="-15" kern="0">
+              <a:rPr lang="en-US" sz="2550" dirty="0" spc="-19" kern="0">
                 <a:solidFill>
                   <a:srgbClr val="14161C"/>
                 </a:solidFill>
@@ -13416,7 +13416,7 @@
               <a:t> và</a:t>
             </a:r>
             <a:r>
-              <a:rPr lang="en-US" sz="2400" dirty="0" spc="1" kern="0">
+              <a:rPr lang="en-US" sz="2550" dirty="0" spc="0" kern="0">
                 <a:solidFill>
                   <a:srgbClr val="14161C"/>
                 </a:solidFill>
@@ -13426,7 +13426,7 @@
               </a:rPr>
               <a:t> nhãn.</a:t>
             </a:r>
-            <a:endParaRPr lang="en-US" sz="2400" dirty="0"/>
+            <a:endParaRPr lang="en-US" sz="2550" dirty="0"/>
           </a:p>
         </p:txBody>
       </p:sp>
@@ -13531,12 +13531,12 @@
           <a:ln/>
         </p:spPr>
         <p:txBody>
-          <a:bodyPr wrap="square" lIns="0" tIns="5334" rIns="0" bIns="-5334" rtlCol="0" anchor="t"/>
+          <a:bodyPr wrap="square" lIns="0" tIns="5667" rIns="0" bIns="-5667" rtlCol="0" anchor="t"/>
           <a:lstStyle/>
           <a:p>
-            <a:pPr algn="l" marL="304800" indent="-217761">
+            <a:pPr algn="l" marL="323850" indent="-231371">
               <a:lnSpc>
-                <a:spcPts val="3360"/>
+                <a:spcPts val="3570"/>
               </a:lnSpc>
               <a:spcAft>
                 <a:spcPts val="750"/>
@@ -13546,7 +13546,7 @@
               <a:buChar char="•"/>
             </a:pPr>
             <a:r>
-              <a:rPr lang="en-US" sz="2400" dirty="0" spc="-12" kern="0">
+              <a:rPr lang="en-US" sz="2550" dirty="0" spc="-11" kern="0">
                 <a:solidFill>
                   <a:srgbClr val="14161C"/>
                 </a:solidFill>
@@ -13554,10 +13554,10 @@
                 <a:ea typeface="Be Vietnam Pro" pitchFamily="34" charset="-122"/>
                 <a:cs typeface="Be Vietnam Pro" pitchFamily="34" charset="-120"/>
               </a:rPr>
-              <a:t>Prometheus</a:t>
-            </a:r>
-            <a:r>
-              <a:rPr lang="en-US" sz="2400" dirty="0" spc="-8" kern="0">
+              <a:t>Prometheus TSDB,</a:t>
+            </a:r>
+            <a:r>
+              <a:rPr lang="en-US" sz="2550" dirty="0" spc="0" kern="0">
                 <a:solidFill>
                   <a:srgbClr val="14161C"/>
                 </a:solidFill>
@@ -13565,32 +13565,21 @@
                 <a:ea typeface="Be Vietnam Pro" pitchFamily="34" charset="-122"/>
                 <a:cs typeface="Be Vietnam Pro" pitchFamily="34" charset="-120"/>
               </a:rPr>
-              <a:t> TSDB,</a:t>
-            </a:r>
-            <a:r>
-              <a:rPr lang="en-US" sz="2400" dirty="0" spc="0" kern="0">
-                <a:solidFill>
-                  <a:srgbClr val="14161C"/>
-                </a:solidFill>
-                <a:latin typeface="Be Vietnam Pro" pitchFamily="34" charset="0"/>
-                <a:ea typeface="Be Vietnam Pro" pitchFamily="34" charset="-122"/>
-                <a:cs typeface="Be Vietnam Pro" pitchFamily="34" charset="-120"/>
-              </a:rPr>
               <a:t> InfluxDB.</a:t>
             </a:r>
-            <a:endParaRPr lang="en-US" sz="2400" dirty="0"/>
+            <a:endParaRPr lang="en-US" sz="2550" dirty="0"/>
           </a:p>
           <a:p>
-            <a:pPr algn="l" marL="304800" indent="-217761">
+            <a:pPr algn="l" marL="323850" indent="-231371">
               <a:lnSpc>
-                <a:spcPts val="3360"/>
+                <a:spcPts val="3570"/>
               </a:lnSpc>
               <a:buSzPct val="100000"/>
               <a:buFont typeface="Arial"/>
               <a:buChar char="•"/>
             </a:pPr>
             <a:r>
-              <a:rPr lang="en-US" sz="2400" dirty="0" spc="-73" kern="0">
+              <a:rPr lang="en-US" sz="2550" dirty="0" spc="-79" kern="0">
                 <a:solidFill>
                   <a:srgbClr val="14161C"/>
                 </a:solidFill>
@@ -13601,7 +13590,7 @@
               <a:t>Tối</a:t>
             </a:r>
             <a:r>
-              <a:rPr lang="en-US" sz="2400" dirty="0" spc="21" kern="0">
+              <a:rPr lang="en-US" sz="2550" dirty="0" spc="25" kern="0">
                 <a:solidFill>
                   <a:srgbClr val="14161C"/>
                 </a:solidFill>
@@ -13612,7 +13601,7 @@
               <a:t> ưu</a:t>
             </a:r>
             <a:r>
-              <a:rPr lang="en-US" sz="2400" dirty="0" spc="1" kern="0">
+              <a:rPr lang="en-US" sz="2550" dirty="0" spc="0" kern="0">
                 <a:solidFill>
                   <a:srgbClr val="14161C"/>
                 </a:solidFill>
@@ -13620,10 +13609,10 @@
                 <a:ea typeface="Be Vietnam Pro" pitchFamily="34" charset="-122"/>
                 <a:cs typeface="Be Vietnam Pro" pitchFamily="34" charset="-120"/>
               </a:rPr>
-              <a:t> ghi</a:t>
-            </a:r>
-            <a:r>
-              <a:rPr lang="en-US" sz="2400" dirty="0" spc="-1" kern="0">
+              <a:t> ghi liên</a:t>
+            </a:r>
+            <a:r>
+              <a:rPr lang="en-US" sz="2550" dirty="0" spc="-1" kern="0">
                 <a:solidFill>
                   <a:srgbClr val="14161C"/>
                 </a:solidFill>
@@ -13631,10 +13620,10 @@
                 <a:ea typeface="Be Vietnam Pro" pitchFamily="34" charset="-122"/>
                 <a:cs typeface="Be Vietnam Pro" pitchFamily="34" charset="-120"/>
               </a:rPr>
-              <a:t> liên</a:t>
-            </a:r>
-            <a:r>
-              <a:rPr lang="en-US" sz="2400" dirty="0" spc="2" kern="0">
+              <a:t> tục, nén,</a:t>
+            </a:r>
+            <a:r>
+              <a:rPr lang="en-US" sz="2550" dirty="0" spc="-5" kern="0">
                 <a:solidFill>
                   <a:srgbClr val="14161C"/>
                 </a:solidFill>
@@ -13642,10 +13631,10 @@
                 <a:ea typeface="Be Vietnam Pro" pitchFamily="34" charset="-122"/>
                 <a:cs typeface="Be Vietnam Pro" pitchFamily="34" charset="-120"/>
               </a:rPr>
-              <a:t> tục,</a:t>
-            </a:r>
-            <a:r>
-              <a:rPr lang="en-US" sz="2400" dirty="0" spc="1" kern="0">
+              <a:t> hết</a:t>
+            </a:r>
+            <a:r>
+              <a:rPr lang="en-US" sz="2550" dirty="0" spc="1" kern="0">
                 <a:solidFill>
                   <a:srgbClr val="14161C"/>
                 </a:solidFill>
@@ -13653,31 +13642,9 @@
                 <a:ea typeface="Be Vietnam Pro" pitchFamily="34" charset="-122"/>
                 <a:cs typeface="Be Vietnam Pro" pitchFamily="34" charset="-120"/>
               </a:rPr>
-              <a:t> nén,</a:t>
-            </a:r>
-            <a:r>
-              <a:rPr lang="en-US" sz="2400" dirty="0" spc="-6" kern="0">
-                <a:solidFill>
-                  <a:srgbClr val="14161C"/>
-                </a:solidFill>
-                <a:latin typeface="Be Vietnam Pro" pitchFamily="34" charset="0"/>
-                <a:ea typeface="Be Vietnam Pro" pitchFamily="34" charset="-122"/>
-                <a:cs typeface="Be Vietnam Pro" pitchFamily="34" charset="-120"/>
-              </a:rPr>
-              <a:t> hết</a:t>
-            </a:r>
-            <a:r>
-              <a:rPr lang="en-US" sz="2400" dirty="0" spc="1" kern="0">
-                <a:solidFill>
-                  <a:srgbClr val="14161C"/>
-                </a:solidFill>
-                <a:latin typeface="Be Vietnam Pro" pitchFamily="34" charset="0"/>
-                <a:ea typeface="Be Vietnam Pro" pitchFamily="34" charset="-122"/>
-                <a:cs typeface="Be Vietnam Pro" pitchFamily="34" charset="-120"/>
-              </a:rPr>
               <a:t> hạn.</a:t>
             </a:r>
-            <a:endParaRPr lang="en-US" sz="2400" dirty="0"/>
+            <a:endParaRPr lang="en-US" sz="2550" dirty="0"/>
           </a:p>
         </p:txBody>
       </p:sp>
@@ -13837,19 +13804,19 @@
           <a:ln/>
         </p:spPr>
         <p:txBody>
-          <a:bodyPr wrap="square" lIns="0" tIns="5334" rIns="0" bIns="-5334" rtlCol="0" anchor="t"/>
+          <a:bodyPr wrap="square" lIns="0" tIns="5667" rIns="0" bIns="-5667" rtlCol="0" anchor="t"/>
           <a:lstStyle/>
           <a:p>
-            <a:pPr algn="l" marL="304800" indent="-217761">
+            <a:pPr algn="l" marL="323850" indent="-231371">
               <a:lnSpc>
-                <a:spcPts val="3360"/>
+                <a:spcPts val="3570"/>
               </a:lnSpc>
               <a:buSzPct val="100000"/>
               <a:buFont typeface="Arial"/>
               <a:buChar char="•"/>
             </a:pPr>
             <a:r>
-              <a:rPr lang="en-US" sz="2400" dirty="0" spc="-3" kern="0">
+              <a:rPr lang="en-US" sz="2550" dirty="0" spc="2" kern="0">
                 <a:solidFill>
                   <a:srgbClr val="14161C"/>
                 </a:solidFill>
@@ -13860,7 +13827,7 @@
               <a:t>Ví</a:t>
             </a:r>
             <a:r>
-              <a:rPr lang="en-US" sz="2400" dirty="0" spc="3" kern="0">
+              <a:rPr lang="en-US" sz="2550" dirty="0" spc="-2" kern="0">
                 <a:solidFill>
                   <a:srgbClr val="14161C"/>
                 </a:solidFill>
@@ -13871,7 +13838,7 @@
               <a:t> dụ</a:t>
             </a:r>
             <a:r>
-              <a:rPr lang="en-US" sz="2400" dirty="0" spc="-2" kern="0">
+              <a:rPr lang="en-US" sz="2550" dirty="0" spc="-3" kern="0">
                 <a:solidFill>
                   <a:srgbClr val="14161C"/>
                 </a:solidFill>
@@ -13882,7 +13849,7 @@
               <a:t> TimescaleDB</a:t>
             </a:r>
             <a:r>
-              <a:rPr lang="en-US" sz="2400" dirty="0" spc="-18" kern="0">
+              <a:rPr lang="en-US" sz="2550" dirty="0" spc="-18" kern="0">
                 <a:solidFill>
                   <a:srgbClr val="14161C"/>
                 </a:solidFill>
@@ -13893,7 +13860,7 @@
               <a:t> trên</a:t>
             </a:r>
             <a:r>
-              <a:rPr lang="en-US" sz="2400" dirty="0" spc="-15" kern="0">
+              <a:rPr lang="en-US" sz="2550" dirty="0" spc="-16" kern="0">
                 <a:solidFill>
                   <a:srgbClr val="14161C"/>
                 </a:solidFill>
@@ -13903,7 +13870,7 @@
               </a:rPr>
               <a:t> PostgreSQL.</a:t>
             </a:r>
-            <a:endParaRPr lang="en-US" sz="2400" dirty="0"/>
+            <a:endParaRPr lang="en-US" sz="2550" dirty="0"/>
           </a:p>
         </p:txBody>
       </p:sp>
@@ -14041,12 +14008,12 @@
           <a:ln/>
         </p:spPr>
         <p:txBody>
-          <a:bodyPr wrap="square" lIns="0" tIns="5334" rIns="0" bIns="-5334" rtlCol="0" anchor="t"/>
+          <a:bodyPr wrap="square" lIns="0" tIns="5667" rIns="0" bIns="-5667" rtlCol="0" anchor="t"/>
           <a:lstStyle/>
           <a:p>
-            <a:pPr algn="l" marL="304800" indent="-217761">
+            <a:pPr algn="l" marL="323850" indent="-231371">
               <a:lnSpc>
-                <a:spcPts val="3360"/>
+                <a:spcPts val="3570"/>
               </a:lnSpc>
               <a:spcAft>
                 <a:spcPts val="750"/>
@@ -14056,7 +14023,7 @@
               <a:buChar char="•"/>
             </a:pPr>
             <a:r>
-              <a:rPr lang="en-US" sz="2400" dirty="0" spc="-29" kern="0">
+              <a:rPr lang="en-US" sz="2550" dirty="0" spc="-31" kern="0">
                 <a:solidFill>
                   <a:srgbClr val="14161C"/>
                 </a:solidFill>
@@ -14067,7 +14034,7 @@
               <a:t>Làm</a:t>
             </a:r>
             <a:r>
-              <a:rPr lang="en-US" sz="2400" dirty="0" spc="6" kern="0">
+              <a:rPr lang="en-US" sz="2550" dirty="0" spc="6" kern="0">
                 <a:solidFill>
                   <a:srgbClr val="14161C"/>
                 </a:solidFill>
@@ -14078,7 +14045,7 @@
               <a:t> được</a:t>
             </a:r>
             <a:r>
-              <a:rPr lang="en-US" sz="2400" dirty="0" spc="-2" kern="0">
+              <a:rPr lang="en-US" sz="2550" dirty="0" spc="0" kern="0">
                 <a:solidFill>
                   <a:srgbClr val="14161C"/>
                 </a:solidFill>
@@ -14089,7 +14056,7 @@
               <a:t> khi</a:t>
             </a:r>
             <a:r>
-              <a:rPr lang="en-US" sz="2400" dirty="0" spc="-10" kern="0">
+              <a:rPr lang="en-US" sz="2550" dirty="0" spc="-12" kern="0">
                 <a:solidFill>
                   <a:srgbClr val="14161C"/>
                 </a:solidFill>
@@ -14100,7 +14067,7 @@
               <a:t> tải</a:t>
             </a:r>
             <a:r>
-              <a:rPr lang="en-US" sz="2400" dirty="0" spc="10" kern="0">
+              <a:rPr lang="en-US" sz="2550" dirty="0" spc="7" kern="0">
                 <a:solidFill>
                   <a:srgbClr val="14161C"/>
                 </a:solidFill>
@@ -14111,7 +14078,7 @@
               <a:t> vừa</a:t>
             </a:r>
             <a:r>
-              <a:rPr lang="en-US" sz="2400" dirty="0" spc="1" kern="0">
+              <a:rPr lang="en-US" sz="2550" dirty="0" spc="0" kern="0">
                 <a:solidFill>
                   <a:srgbClr val="14161C"/>
                 </a:solidFill>
@@ -14121,19 +14088,19 @@
               </a:rPr>
               <a:t> phải.</a:t>
             </a:r>
-            <a:endParaRPr lang="en-US" sz="2400" dirty="0"/>
+            <a:endParaRPr lang="en-US" sz="2550" dirty="0"/>
           </a:p>
           <a:p>
-            <a:pPr algn="l" marL="304800" indent="-217761">
+            <a:pPr algn="l" marL="323850" indent="-231371">
               <a:lnSpc>
-                <a:spcPts val="3360"/>
+                <a:spcPts val="3570"/>
               </a:lnSpc>
               <a:buSzPct val="100000"/>
               <a:buFont typeface="Arial"/>
               <a:buChar char="•"/>
             </a:pPr>
             <a:r>
-              <a:rPr lang="en-US" sz="2400" dirty="0" spc="-118" kern="0">
+              <a:rPr lang="en-US" sz="2550" dirty="0" spc="-133" kern="0">
                 <a:solidFill>
                   <a:srgbClr val="14161C"/>
                 </a:solidFill>
@@ -14144,7 +14111,7 @@
               <a:t>Tự</a:t>
             </a:r>
             <a:r>
-              <a:rPr lang="en-US" sz="2400" dirty="0" spc="0" kern="0">
+              <a:rPr lang="en-US" sz="2550" dirty="0" spc="0" kern="0">
                 <a:solidFill>
                   <a:srgbClr val="14161C"/>
                 </a:solidFill>
@@ -14152,10 +14119,10 @@
                 <a:ea typeface="Be Vietnam Pro" pitchFamily="34" charset="-122"/>
                 <a:cs typeface="Be Vietnam Pro" pitchFamily="34" charset="-120"/>
               </a:rPr>
-              <a:t> tinh</a:t>
-            </a:r>
-            <a:r>
-              <a:rPr lang="en-US" sz="2400" dirty="0" spc="-1" kern="0">
+              <a:t> tinh chỉnh</a:t>
+            </a:r>
+            <a:r>
+              <a:rPr lang="en-US" sz="2550" dirty="0" spc="1" kern="0">
                 <a:solidFill>
                   <a:srgbClr val="14161C"/>
                 </a:solidFill>
@@ -14163,10 +14130,10 @@
                 <a:ea typeface="Be Vietnam Pro" pitchFamily="34" charset="-122"/>
                 <a:cs typeface="Be Vietnam Pro" pitchFamily="34" charset="-120"/>
               </a:rPr>
-              <a:t> chỉnh</a:t>
-            </a:r>
-            <a:r>
-              <a:rPr lang="en-US" sz="2400" dirty="0" spc="0" kern="0">
+              <a:t> chỉ</a:t>
+            </a:r>
+            <a:r>
+              <a:rPr lang="en-US" sz="2550" dirty="0" spc="-2" kern="0">
                 <a:solidFill>
                   <a:srgbClr val="14161C"/>
                 </a:solidFill>
@@ -14174,10 +14141,10 @@
                 <a:ea typeface="Be Vietnam Pro" pitchFamily="34" charset="-122"/>
                 <a:cs typeface="Be Vietnam Pro" pitchFamily="34" charset="-120"/>
               </a:rPr>
-              <a:t> chỉ</a:t>
-            </a:r>
-            <a:r>
-              <a:rPr lang="en-US" sz="2400" dirty="0" spc="2" kern="0">
+              <a:t> mục,</a:t>
+            </a:r>
+            <a:r>
+              <a:rPr lang="en-US" sz="2550" dirty="0" spc="0" kern="0">
                 <a:solidFill>
                   <a:srgbClr val="14161C"/>
                 </a:solidFill>
@@ -14185,10 +14152,10 @@
                 <a:ea typeface="Be Vietnam Pro" pitchFamily="34" charset="-122"/>
                 <a:cs typeface="Be Vietnam Pro" pitchFamily="34" charset="-120"/>
               </a:rPr>
-              <a:t> mục, phân</a:t>
-            </a:r>
-            <a:r>
-              <a:rPr lang="en-US" sz="2400" dirty="0" spc="1" kern="0">
+              <a:t> phân</a:t>
+            </a:r>
+            <a:r>
+              <a:rPr lang="en-US" sz="2550" dirty="0" spc="-1" kern="0">
                 <a:solidFill>
                   <a:srgbClr val="14161C"/>
                 </a:solidFill>
@@ -14198,7 +14165,7 @@
               </a:rPr>
               <a:t> vùng.</a:t>
             </a:r>
-            <a:endParaRPr lang="en-US" sz="2400" dirty="0"/>
+            <a:endParaRPr lang="en-US" sz="2550" dirty="0"/>
           </a:p>
         </p:txBody>
       </p:sp>

--- a/system-design-101/vi/lessons/sd-13-005/slides/sd-13-005.pptx
+++ b/system-design-101/vi/lessons/sd-13-005/slides/sd-13-005.pptx
@@ -10864,7 +10864,7 @@
               <a:buNone/>
             </a:pPr>
             <a:r>
-              <a:rPr lang="en-US" sz="4500" dirty="0" spc="1" kern="0">
+              <a:rPr lang="en-US" sz="4500" dirty="0" spc="3" kern="0">
                 <a:solidFill>
                   <a:srgbClr val="F3EEE3"/>
                 </a:solidFill>
@@ -10872,10 +10872,10 @@
                 <a:ea typeface="Bricolage Grotesque ExtraBold" pitchFamily="34" charset="-122"/>
                 <a:cs typeface="Bricolage Grotesque ExtraBold" pitchFamily="34" charset="-120"/>
               </a:rPr>
-              <a:t>Cơ sở dữ</a:t>
-            </a:r>
-            <a:r>
-              <a:rPr lang="en-US" sz="4500" dirty="0" spc="4" kern="0">
+              <a:t>Kho</a:t>
+            </a:r>
+            <a:r>
+              <a:rPr lang="en-US" sz="4500" dirty="0" spc="13" kern="0">
                 <a:solidFill>
                   <a:srgbClr val="F3EEE3"/>
                 </a:solidFill>
@@ -10883,10 +10883,10 @@
                 <a:ea typeface="Bricolage Grotesque ExtraBold" pitchFamily="34" charset="-122"/>
                 <a:cs typeface="Bricolage Grotesque ExtraBold" pitchFamily="34" charset="-120"/>
               </a:rPr>
-              <a:t> liệu</a:t>
-            </a:r>
-            <a:r>
-              <a:rPr lang="en-US" sz="4500" dirty="0" spc="13" kern="0">
+              <a:t> đa</a:t>
+            </a:r>
+            <a:r>
+              <a:rPr lang="en-US" sz="4500" dirty="0" spc="15" kern="0">
                 <a:solidFill>
                   <a:srgbClr val="F3EEE3"/>
                 </a:solidFill>
@@ -10894,10 +10894,10 @@
                 <a:ea typeface="Bricolage Grotesque ExtraBold" pitchFamily="34" charset="-122"/>
                 <a:cs typeface="Bricolage Grotesque ExtraBold" pitchFamily="34" charset="-120"/>
               </a:rPr>
-              <a:t> đa</a:t>
-            </a:r>
-            <a:r>
-              <a:rPr lang="en-US" sz="4500" dirty="0" spc="15" kern="0">
+              <a:t> dụng,</a:t>
+            </a:r>
+            <a:r>
+              <a:rPr lang="en-US" sz="4500" dirty="0" spc="4" kern="0">
                 <a:solidFill>
                   <a:srgbClr val="F3EEE3"/>
                 </a:solidFill>
@@ -10905,21 +10905,10 @@
                 <a:ea typeface="Bricolage Grotesque ExtraBold" pitchFamily="34" charset="-122"/>
                 <a:cs typeface="Bricolage Grotesque ExtraBold" pitchFamily="34" charset="-120"/>
               </a:rPr>
-              <a:t> dụng,</a:t>
-            </a:r>
-            <a:r>
-              <a:rPr lang="en-US" sz="4500" dirty="0" spc="3" kern="0">
-                <a:solidFill>
-                  <a:srgbClr val="F3EEE3"/>
-                </a:solidFill>
-                <a:latin typeface="Bricolage Grotesque ExtraBold" pitchFamily="34" charset="0"/>
-                <a:ea typeface="Bricolage Grotesque ExtraBold" pitchFamily="34" charset="-122"/>
-                <a:cs typeface="Bricolage Grotesque ExtraBold" pitchFamily="34" charset="-120"/>
-              </a:rPr>
               <a:t> thiết</a:t>
             </a:r>
             <a:r>
-              <a:rPr lang="en-US" sz="4500" dirty="0" spc="-33" kern="0">
+              <a:rPr lang="en-US" sz="4500" dirty="0" spc="-35" kern="0">
                 <a:solidFill>
                   <a:srgbClr val="F3EEE3"/>
                 </a:solidFill>
@@ -12469,6 +12458,48 @@
               </a:rPr>
               <a:t> chuỗi.</a:t>
             </a:r>
+            <a:endParaRPr lang="en-US" sz="2700" dirty="0"/>
+          </a:p>
+          <a:p>
+            <a:pPr algn="l" indent="0" marL="0">
+              <a:lnSpc>
+                <a:spcPts val="3645"/>
+              </a:lnSpc>
+              <a:buNone/>
+            </a:pPr>
+            <a:r>
+              <a:rPr lang="en-US" sz="2700" dirty="0" spc="0" kern="0">
+                <a:solidFill>
+                  <a:srgbClr val="F3EEE3"/>
+                </a:solidFill>
+                <a:latin typeface="Be Vietnam Pro" pitchFamily="34" charset="0"/>
+                <a:ea typeface="Be Vietnam Pro" pitchFamily="34" charset="-122"/>
+                <a:cs typeface="Be Vietnam Pro" pitchFamily="34" charset="-120"/>
+              </a:rPr>
+              <a:t>Đổi</a:t>
+            </a:r>
+            <a:r>
+              <a:rPr lang="en-US" sz="2700" dirty="0" spc="-7" kern="0">
+                <a:solidFill>
+                  <a:srgbClr val="F3EEE3"/>
+                </a:solidFill>
+                <a:latin typeface="Be Vietnam Pro" pitchFamily="34" charset="0"/>
+                <a:ea typeface="Be Vietnam Pro" pitchFamily="34" charset="-122"/>
+                <a:cs typeface="Be Vietnam Pro" pitchFamily="34" charset="-120"/>
+              </a:rPr>
+              <a:t> một</a:t>
+            </a:r>
+            <a:r>
+              <a:rPr lang="en-US" sz="2700" dirty="0" spc="-2" kern="0">
+                <a:solidFill>
+                  <a:srgbClr val="F3EEE3"/>
+                </a:solidFill>
+                <a:latin typeface="Be Vietnam Pro" pitchFamily="34" charset="0"/>
+                <a:ea typeface="Be Vietnam Pro" pitchFamily="34" charset="-122"/>
+                <a:cs typeface="Be Vietnam Pro" pitchFamily="34" charset="-120"/>
+              </a:rPr>
+              <a:t> nhãn</a:t>
+            </a:r>
             <a:r>
               <a:rPr lang="en-US" sz="2700" dirty="0" spc="-1" kern="0">
                 <a:solidFill>
@@ -12478,10 +12509,10 @@
                 <a:ea typeface="Be Vietnam Pro" pitchFamily="34" charset="-122"/>
                 <a:cs typeface="Be Vietnam Pro" pitchFamily="34" charset="-120"/>
               </a:rPr>
-              <a:t> Đổi</a:t>
-            </a:r>
-            <a:r>
-              <a:rPr lang="en-US" sz="2700" dirty="0" spc="-7" kern="0">
+              <a:t> là</a:t>
+            </a:r>
+            <a:r>
+              <a:rPr lang="en-US" sz="2700" dirty="0" spc="0" kern="0">
                 <a:solidFill>
                   <a:srgbClr val="F3EEE3"/>
                 </a:solidFill>
@@ -12489,43 +12520,10 @@
                 <a:ea typeface="Be Vietnam Pro" pitchFamily="34" charset="-122"/>
                 <a:cs typeface="Be Vietnam Pro" pitchFamily="34" charset="-120"/>
               </a:rPr>
-              <a:t> một</a:t>
+              <a:t> chuỗi</a:t>
             </a:r>
             <a:r>
               <a:rPr lang="en-US" sz="2700" dirty="0" spc="-2" kern="0">
-                <a:solidFill>
-                  <a:srgbClr val="F3EEE3"/>
-                </a:solidFill>
-                <a:latin typeface="Be Vietnam Pro" pitchFamily="34" charset="0"/>
-                <a:ea typeface="Be Vietnam Pro" pitchFamily="34" charset="-122"/>
-                <a:cs typeface="Be Vietnam Pro" pitchFamily="34" charset="-120"/>
-              </a:rPr>
-              <a:t> nhãn</a:t>
-            </a:r>
-            <a:r>
-              <a:rPr lang="en-US" sz="2700" dirty="0" spc="-1" kern="0">
-                <a:solidFill>
-                  <a:srgbClr val="F3EEE3"/>
-                </a:solidFill>
-                <a:latin typeface="Be Vietnam Pro" pitchFamily="34" charset="0"/>
-                <a:ea typeface="Be Vietnam Pro" pitchFamily="34" charset="-122"/>
-                <a:cs typeface="Be Vietnam Pro" pitchFamily="34" charset="-120"/>
-              </a:rPr>
-              <a:t> là</a:t>
-            </a:r>
-            <a:r>
-              <a:rPr lang="en-US" sz="2700" dirty="0" spc="0" kern="0">
-                <a:solidFill>
-                  <a:srgbClr val="F3EEE3"/>
-                </a:solidFill>
-                <a:latin typeface="Be Vietnam Pro" pitchFamily="34" charset="0"/>
-                <a:ea typeface="Be Vietnam Pro" pitchFamily="34" charset="-122"/>
-                <a:cs typeface="Be Vietnam Pro" pitchFamily="34" charset="-120"/>
-              </a:rPr>
-              <a:t> chuỗi</a:t>
-            </a:r>
-            <a:r>
-              <a:rPr lang="en-US" sz="2700" dirty="0" spc="-1" kern="0">
                 <a:solidFill>
                   <a:srgbClr val="F3EEE3"/>
                 </a:solidFill>

--- a/system-design-101/vi/lessons/sd-13-005/slides/sd-13-005.pptx
+++ b/system-design-101/vi/lessons/sd-13-005/slides/sd-13-005.pptx
@@ -9142,7 +9142,7 @@
               <a:buNone/>
             </a:pPr>
             <a:r>
-              <a:rPr lang="en-US" sz="2400" b="1" dirty="0" spc="-1" kern="0">
+              <a:rPr lang="en-US" sz="2550" b="1" dirty="0" spc="2" kern="0">
                 <a:solidFill>
                   <a:srgbClr val="14161C"/>
                 </a:solidFill>
@@ -9150,9 +9150,20 @@
                 <a:ea typeface="Be Vietnam Pro" pitchFamily="34" charset="-122"/>
                 <a:cs typeface="Be Vietnam Pro" pitchFamily="34" charset="-120"/>
               </a:rPr>
-              <a:t>chuỗi 1</a:t>
-            </a:r>
-            <a:endParaRPr lang="en-US" sz="2400" dirty="0"/>
+              <a:t>chuỗi</a:t>
+            </a:r>
+            <a:r>
+              <a:rPr lang="en-US" sz="2550" b="1" dirty="0" spc="0" kern="0">
+                <a:solidFill>
+                  <a:srgbClr val="14161C"/>
+                </a:solidFill>
+                <a:latin typeface="Be Vietnam Pro" pitchFamily="34" charset="0"/>
+                <a:ea typeface="Be Vietnam Pro" pitchFamily="34" charset="-122"/>
+                <a:cs typeface="Be Vietnam Pro" pitchFamily="34" charset="-120"/>
+              </a:rPr>
+              <a:t> 1</a:t>
+            </a:r>
+            <a:endParaRPr lang="en-US" sz="2550" dirty="0"/>
           </a:p>
         </p:txBody>
       </p:sp>
@@ -9228,7 +9239,7 @@
               <a:buNone/>
             </a:pPr>
             <a:r>
-              <a:rPr lang="en-US" sz="2400" b="1" dirty="0" spc="-1" kern="0">
+              <a:rPr lang="en-US" sz="2550" b="1" dirty="0" spc="2" kern="0">
                 <a:solidFill>
                   <a:srgbClr val="14161C"/>
                 </a:solidFill>
@@ -9239,7 +9250,7 @@
               <a:t>chuỗi</a:t>
             </a:r>
             <a:r>
-              <a:rPr lang="en-US" sz="2400" b="1" dirty="0" spc="4" kern="0">
+              <a:rPr lang="en-US" sz="2550" b="1" dirty="0" spc="3" kern="0">
                 <a:solidFill>
                   <a:srgbClr val="14161C"/>
                 </a:solidFill>
@@ -9249,7 +9260,7 @@
               </a:rPr>
               <a:t> 2</a:t>
             </a:r>
-            <a:endParaRPr lang="en-US" sz="2400" dirty="0"/>
+            <a:endParaRPr lang="en-US" sz="2550" dirty="0"/>
           </a:p>
         </p:txBody>
       </p:sp>
@@ -9325,7 +9336,7 @@
               <a:buNone/>
             </a:pPr>
             <a:r>
-              <a:rPr lang="en-US" sz="2400" b="1" dirty="0" spc="-1" kern="0">
+              <a:rPr lang="en-US" sz="2550" b="1" dirty="0" spc="2" kern="0">
                 <a:solidFill>
                   <a:srgbClr val="14161C"/>
                 </a:solidFill>
@@ -9336,7 +9347,7 @@
               <a:t>chuỗi</a:t>
             </a:r>
             <a:r>
-              <a:rPr lang="en-US" sz="2400" b="1" dirty="0" spc="-2" kern="0">
+              <a:rPr lang="en-US" sz="2550" b="1" dirty="0" spc="-2" kern="0">
                 <a:solidFill>
                   <a:srgbClr val="14161C"/>
                 </a:solidFill>
@@ -9346,7 +9357,7 @@
               </a:rPr>
               <a:t> 3</a:t>
             </a:r>
-            <a:endParaRPr lang="en-US" sz="2400" dirty="0"/>
+            <a:endParaRPr lang="en-US" sz="2550" dirty="0"/>
           </a:p>
         </p:txBody>
       </p:sp>
@@ -9422,7 +9433,7 @@
               <a:buNone/>
             </a:pPr>
             <a:r>
-              <a:rPr lang="en-US" sz="2400" b="1" dirty="0" spc="-1" kern="0">
+              <a:rPr lang="en-US" sz="2550" b="1" dirty="0" spc="2" kern="0">
                 <a:solidFill>
                   <a:srgbClr val="14161C"/>
                 </a:solidFill>
@@ -9433,7 +9444,7 @@
               <a:t>chuỗi</a:t>
             </a:r>
             <a:r>
-              <a:rPr lang="en-US" sz="2400" b="1" dirty="0" spc="2" kern="0">
+              <a:rPr lang="en-US" sz="2550" b="1" dirty="0" spc="-1" kern="0">
                 <a:solidFill>
                   <a:srgbClr val="14161C"/>
                 </a:solidFill>
@@ -9443,7 +9454,7 @@
               </a:rPr>
               <a:t> 4</a:t>
             </a:r>
-            <a:endParaRPr lang="en-US" sz="2400" dirty="0"/>
+            <a:endParaRPr lang="en-US" sz="2550" dirty="0"/>
           </a:p>
         </p:txBody>
       </p:sp>
@@ -14196,7 +14207,7 @@
               <a:buNone/>
             </a:pPr>
             <a:r>
-              <a:rPr lang="en-US" sz="2400" b="1" dirty="0" spc="2" kern="0">
+              <a:rPr lang="en-US" sz="2550" b="1" dirty="0" spc="6" kern="0">
                 <a:solidFill>
                   <a:srgbClr val="F3EEE3"/>
                 </a:solidFill>
@@ -14207,7 +14218,7 @@
               <a:t>Cách</a:t>
             </a:r>
             <a:r>
-              <a:rPr lang="en-US" sz="2400" b="1" dirty="0" spc="-3" kern="0">
+              <a:rPr lang="en-US" sz="2550" b="1" dirty="0" spc="-2" kern="0">
                 <a:solidFill>
                   <a:srgbClr val="F3EEE3"/>
                 </a:solidFill>
@@ -14218,7 +14229,7 @@
               <a:t> kiểm</a:t>
             </a:r>
             <a:r>
-              <a:rPr lang="en-US" sz="2400" b="1" dirty="0" spc="-8" kern="0">
+              <a:rPr lang="en-US" sz="2550" b="1" dirty="0" spc="-10" kern="0">
                 <a:solidFill>
                   <a:srgbClr val="F3EEE3"/>
                 </a:solidFill>
@@ -14229,7 +14240,7 @@
               <a:t> tra:</a:t>
             </a:r>
             <a:r>
-              <a:rPr lang="en-US" sz="2400" b="1" dirty="0" spc="1" kern="0">
+              <a:rPr lang="en-US" sz="2550" b="1" dirty="0" spc="-1" kern="0">
                 <a:solidFill>
                   <a:srgbClr val="F3EEE3"/>
                 </a:solidFill>
@@ -14240,7 +14251,7 @@
               <a:t> thử</a:t>
             </a:r>
             <a:r>
-              <a:rPr lang="en-US" sz="2400" b="1" dirty="0" spc="-9" kern="0">
+              <a:rPr lang="en-US" sz="2550" b="1" dirty="0" spc="0" kern="0">
                 <a:solidFill>
                   <a:srgbClr val="F3EEE3"/>
                 </a:solidFill>
@@ -14248,10 +14259,10 @@
                 <a:ea typeface="Be Vietnam Pro" pitchFamily="34" charset="-122"/>
                 <a:cs typeface="Be Vietnam Pro" pitchFamily="34" charset="-120"/>
               </a:rPr>
-              <a:t> với</a:t>
-            </a:r>
-            <a:r>
-              <a:rPr lang="en-US" sz="2400" b="1" dirty="0" spc="-1" kern="0">
+              <a:t> tải</a:t>
+            </a:r>
+            <a:r>
+              <a:rPr lang="en-US" sz="2550" b="1" dirty="0" spc="-1" kern="0">
                 <a:solidFill>
                   <a:srgbClr val="F3EEE3"/>
                 </a:solidFill>
@@ -14259,10 +14270,10 @@
                 <a:ea typeface="Be Vietnam Pro" pitchFamily="34" charset="-122"/>
                 <a:cs typeface="Be Vietnam Pro" pitchFamily="34" charset="-120"/>
               </a:rPr>
-              <a:t> tải</a:t>
-            </a:r>
-            <a:r>
-              <a:rPr lang="en-US" sz="2400" b="1" dirty="0" spc="-4" kern="0">
+              <a:t> gần</a:t>
+            </a:r>
+            <a:r>
+              <a:rPr lang="en-US" sz="2550" b="1" dirty="0" spc="-5" kern="0">
                 <a:solidFill>
                   <a:srgbClr val="F3EEE3"/>
                 </a:solidFill>
@@ -14270,10 +14281,10 @@
                 <a:ea typeface="Be Vietnam Pro" pitchFamily="34" charset="-122"/>
                 <a:cs typeface="Be Vietnam Pro" pitchFamily="34" charset="-120"/>
               </a:rPr>
-              <a:t> gần</a:t>
-            </a:r>
-            <a:r>
-              <a:rPr lang="en-US" sz="2400" b="1" dirty="0" spc="-6" kern="0">
+              <a:t> thật</a:t>
+            </a:r>
+            <a:r>
+              <a:rPr lang="en-US" sz="2550" b="1" dirty="0" spc="9" kern="0">
                 <a:solidFill>
                   <a:srgbClr val="F3EEE3"/>
                 </a:solidFill>
@@ -14281,10 +14292,10 @@
                 <a:ea typeface="Be Vietnam Pro" pitchFamily="34" charset="-122"/>
                 <a:cs typeface="Be Vietnam Pro" pitchFamily="34" charset="-120"/>
               </a:rPr>
-              <a:t> thật</a:t>
-            </a:r>
-            <a:r>
-              <a:rPr lang="en-US" sz="2400" b="1" dirty="0" spc="9" kern="0">
+              <a:t> trước</a:t>
+            </a:r>
+            <a:r>
+              <a:rPr lang="en-US" sz="2550" b="1" dirty="0" spc="2" kern="0">
                 <a:solidFill>
                   <a:srgbClr val="F3EEE3"/>
                 </a:solidFill>
@@ -14292,10 +14303,10 @@
                 <a:ea typeface="Be Vietnam Pro" pitchFamily="34" charset="-122"/>
                 <a:cs typeface="Be Vietnam Pro" pitchFamily="34" charset="-120"/>
               </a:rPr>
-              <a:t> trước</a:t>
-            </a:r>
-            <a:r>
-              <a:rPr lang="en-US" sz="2400" b="1" dirty="0" spc="0" kern="0">
+              <a:t> khi</a:t>
+            </a:r>
+            <a:r>
+              <a:rPr lang="en-US" sz="2550" b="1" dirty="0" spc="-5" kern="0">
                 <a:solidFill>
                   <a:srgbClr val="F3EEE3"/>
                 </a:solidFill>
@@ -14303,20 +14314,9 @@
                 <a:ea typeface="Be Vietnam Pro" pitchFamily="34" charset="-122"/>
                 <a:cs typeface="Be Vietnam Pro" pitchFamily="34" charset="-120"/>
               </a:rPr>
-              <a:t> khi</a:t>
-            </a:r>
-            <a:r>
-              <a:rPr lang="en-US" sz="2400" b="1" dirty="0" spc="-6" kern="0">
-                <a:solidFill>
-                  <a:srgbClr val="F3EEE3"/>
-                </a:solidFill>
-                <a:latin typeface="Be Vietnam Pro" pitchFamily="34" charset="0"/>
-                <a:ea typeface="Be Vietnam Pro" pitchFamily="34" charset="-122"/>
-                <a:cs typeface="Be Vietnam Pro" pitchFamily="34" charset="-120"/>
-              </a:rPr>
               <a:t> chốt.</a:t>
             </a:r>
-            <a:endParaRPr lang="en-US" sz="2400" dirty="0"/>
+            <a:endParaRPr lang="en-US" sz="2550" dirty="0"/>
           </a:p>
         </p:txBody>
       </p:sp>
